--- a/dist/초6/수학/연산과비례/초6_수학_연산과비례_05_비와비율.pptx
+++ b/dist/초6/수학/연산과비례/초6_수학_연산과비례_05_비와비율.pptx
@@ -121,13 +121,13 @@
   <p:extLst>
     <p:ext uri="{521415D9-36F7-43E2-AB2F-B90AF26B5E84}">
       <p14:sectionLst xmlns:p14="http://schemas.microsoft.com/office/powerpoint/2010/main">
-        <p14:section name="도입" id="{552593f4-cc51-37cf-d38e-7559942430ea}">
+        <p14:section name="도입" id="{21ca0038-8a6b-d1df-3623-94a66a0ed96a}">
           <p14:sldIdLst>
             <p14:sldId id="256"/>
             <p14:sldId id="257"/>
           </p14:sldIdLst>
         </p14:section>
-        <p14:section name="개념" id="{ede959c6-794f-a1cc-dc7e-5c953ee31347}">
+        <p14:section name="개념" id="{f154e031-7e61-8230-8eaf-82bf00aaf75d}">
           <p14:sldIdLst>
             <p14:sldId id="258"/>
             <p14:sldId id="259"/>
@@ -135,7 +135,7 @@
             <p14:sldId id="263"/>
           </p14:sldIdLst>
         </p14:section>
-        <p14:section name="연습" id="{34cfd8f8-36c7-c647-8976-7de8b7d8b0cf}">
+        <p14:section name="연습" id="{50ac272a-cf70-bdec-99d2-787394e634c2}">
           <p14:sldIdLst>
             <p14:sldId id="261"/>
             <p14:sldId id="262"/>
@@ -143,25 +143,25 @@
             <p14:sldId id="265"/>
           </p14:sldIdLst>
         </p14:section>
-        <p14:section name="개념" id="{45dd19f8-3b58-b014-6e20-85db00d5ef31}">
+        <p14:section name="개념" id="{a6d3d745-3c43-5100-a20c-d1d8705e567b}">
           <p14:sldIdLst/>
         </p14:section>
-        <p14:section name="연습" id="{d87533c3-d92c-9ad1-d9c5-2bcf8bd3b829}">
+        <p14:section name="연습" id="{1a904371-1eef-8773-858b-bd9a9a590414}">
           <p14:sldIdLst/>
         </p14:section>
-        <p14:section name="확인" id="{753b11a6-1ae5-20e6-2b5c-e94d01976f34}">
+        <p14:section name="확인" id="{8e0c6eda-9a3b-9f26-4785-96686ba6b022}">
           <p14:sldIdLst>
             <p14:sldId id="266"/>
             <p14:sldId id="267"/>
             <p14:sldId id="268"/>
           </p14:sldIdLst>
         </p14:section>
-        <p14:section name="정리" id="{d01fff4e-0664-cabe-c086-0b018283ee5a}">
+        <p14:section name="정리" id="{0bba10e2-0886-4c91-431f-99bd14102519}">
           <p14:sldIdLst>
             <p14:sldId id="269"/>
           </p14:sldIdLst>
         </p14:section>
-        <p14:section name="보충" id="{55834c0f-2ac1-b537-675e-68db3e5c4608}">
+        <p14:section name="보충" id="{85a35f5e-263a-6afe-837f-9d1a7bd6b418}">
           <p14:sldIdLst>
             <p14:sldId id="270"/>
           </p14:sldIdLst>
@@ -3611,7 +3611,7 @@
                 <a:ea typeface="맑은 고딕" pitchFamily="34" charset="-122"/>
                 <a:cs typeface="맑은 고딕" pitchFamily="34" charset="-120"/>
               </a:rPr>
-              <a:t>버스가 2시간 동안 150 km를 갔어요.</a:t>
+              <a:t>버스가 2시간 동안 150 km를 갔어요.</a:t>
             </a:r>
             <a:endParaRPr lang="ko-KR" sz="2800" dirty="0"/>
           </a:p>
@@ -7845,7 +7845,7 @@
           </p:nvPr>
         </p:nvGraphicFramePr>
         <p:xfrm>
-          <a:off x="1293876" y="2286635"/>
+          <a:off x="1293876" y="2284730"/>
           <a:ext cx="9601200" cy="914400"/>
         </p:xfrm>
         <a:graphic>
@@ -7859,7 +7859,7 @@
                 <a:gridCol w="1632204"/>
                 <a:gridCol w="1632204"/>
               </a:tblGrid>
-              <a:tr h="511810">
+              <a:tr h="512572">
                 <a:tc>
                   <a:txBody>
                     <a:bodyPr/>
@@ -8201,7 +8201,7 @@
                   </a:tcPr>
                 </a:tc>
               </a:tr>
-              <a:tr h="511810">
+              <a:tr h="512572">
                 <a:tc>
                   <a:txBody>
                     <a:bodyPr/>
@@ -8543,7 +8543,7 @@
                   </a:tcPr>
                 </a:tc>
               </a:tr>
-              <a:tr h="511810">
+              <a:tr h="512572">
                 <a:tc>
                   <a:txBody>
                     <a:bodyPr/>
@@ -8885,7 +8885,7 @@
                   </a:tcPr>
                 </a:tc>
               </a:tr>
-              <a:tr h="511810">
+              <a:tr h="512572">
                 <a:tc>
                   <a:txBody>
                     <a:bodyPr/>
@@ -9227,7 +9227,7 @@
                   </a:tcPr>
                 </a:tc>
               </a:tr>
-              <a:tr h="511810">
+              <a:tr h="512572">
                 <a:tc>
                   <a:txBody>
                     <a:bodyPr/>
